--- a/mus147-DTP-hashida.pptx
+++ b/mus147-DTP-hashida.pptx
@@ -114,6 +114,11 @@
       </a:defRPr>
     </a:lvl9pPr>
   </p:defaultTextStyle>
+  <p:extLst>
+    <p:ext uri="{EFAFB233-063F-42B5-8137-9DF3F51BA10A}">
+      <p15:sldGuideLst xmlns:p15="http://schemas.microsoft.com/office/powerpoint/2012/main"/>
+    </p:ext>
+  </p:extLst>
 </p:presentation>
 </file>
 
@@ -199,7 +204,7 @@
           <a:p>
             <a:fld id="{9B70B496-7112-B048-9084-25035A2CC48F}" type="datetimeFigureOut">
               <a:rPr kumimoji="1" lang="ja-JP" altLang="en-US" smtClean="0"/>
-              <a:t>2026/8/30</a:t>
+              <a:t>2026/8/31</a:t>
             </a:fld>
             <a:endParaRPr kumimoji="1" lang="ja-JP" altLang="en-US"/>
           </a:p>
@@ -1248,6 +1253,22 @@
               <a:rPr lang="ja-JP" altLang="ja-JP"/>
               <a:t>これが，今回のDynamic Tonal Perspectiveの基本的な考え方です．</a:t>
             </a:r>
+            <a:br>
+              <a:rPr lang="en-US" altLang="ja-JP" dirty="0"/>
+            </a:br>
+            <a:br>
+              <a:rPr lang="en-US" altLang="ja-JP" dirty="0"/>
+            </a:br>
+            <a:r>
+              <a:rPr lang="ja-JP" altLang="ja-JP"/>
+              <a:t>では，このRelative Tonal Frameは，歌唱の中でどう動いていくのか。</a:t>
+            </a:r>
+          </a:p>
+          <a:p>
+            <a:r>
+              <a:rPr lang="ja-JP" altLang="ja-JP"/>
+              <a:t>ここが，Dynamic Tonal Perspectiveの「Dynamic」にあたる部分です。</a:t>
+            </a:r>
           </a:p>
         </p:txBody>
       </p:sp>
@@ -1333,38 +1354,162 @@
           <a:p>
             <a:r>
               <a:rPr lang="ja-JP" altLang="ja-JP"/>
-              <a:t>[5枚目　Dynamic Tonal Perspective]</a:t>
-            </a:r>
-          </a:p>
-          <a:p>
-            <a:r>
-              <a:rPr lang="ja-JP" altLang="ja-JP"/>
-              <a:t>今回特に重視しているのは，これらを固定値として扱わないことです．</a:t>
-            </a:r>
-          </a:p>
-          <a:p>
-            <a:r>
-              <a:rPr lang="ja-JP" altLang="ja-JP"/>
-              <a:t>歌い始めに形成された調性参照は，その後ずっと同じ位置にあるとは限りません．</a:t>
-            </a:r>
-          </a:p>
-          <a:p>
-            <a:r>
-              <a:rPr lang="ja-JP" altLang="ja-JP"/>
-              <a:t>歌唱を続ける中で，ある程度維持されたり，少しずつ調整されたり，場合によっては別の枠組みとして再形成されたりします．</a:t>
-            </a:r>
-          </a:p>
-          <a:p>
-            <a:r>
-              <a:rPr lang="ja-JP" altLang="ja-JP"/>
-              <a:t>ですので，この研究では「現在何調か」を一点で推定するよりも，「調性参照が時間の中でどう形成され，どう動いていくか」を扱います．</a:t>
-            </a:r>
-          </a:p>
-          <a:p>
-            <a:r>
-              <a:rPr lang="ja-JP" altLang="ja-JP"/>
-              <a:t>この見方をDynamic Tonal Perspective，動的調性視と呼んでいます．</a:t>
-            </a:r>
+              <a:t>私は，歌い手の調性参照というものを，最初に一度決めたら，あとはずっと同じ場所にあるものとは考えていません。</a:t>
+            </a:r>
+          </a:p>
+          <a:p>
+            <a:r>
+              <a:rPr lang="ja-JP" altLang="ja-JP"/>
+              <a:t>まず歌い始めるときに，何らかの調性参照が</a:t>
+            </a:r>
+            <a:r>
+              <a:rPr lang="ja-JP" altLang="ja-JP" b="1"/>
+              <a:t>形成され</a:t>
+            </a:r>
+            <a:r>
+              <a:rPr lang="ja-JP" altLang="en-US" b="1"/>
+              <a:t>ます</a:t>
+            </a:r>
+            <a:r>
+              <a:rPr lang="ja-JP" altLang="ja-JP"/>
+              <a:t>。</a:t>
+            </a:r>
+          </a:p>
+          <a:p>
+            <a:r>
+              <a:rPr lang="ja-JP" altLang="ja-JP"/>
+              <a:t>そして，その後の歌唱がそのFrameの中で自然に説明できているあいだは，その状態が</a:t>
+            </a:r>
+            <a:r>
+              <a:rPr lang="ja-JP" altLang="ja-JP" b="1"/>
+              <a:t>維持され</a:t>
+            </a:r>
+            <a:r>
+              <a:rPr lang="ja-JP" altLang="en-US" b="1"/>
+              <a:t>ます</a:t>
+            </a:r>
+            <a:r>
+              <a:rPr lang="ja-JP" altLang="ja-JP"/>
+              <a:t>。</a:t>
+            </a:r>
+          </a:p>
+          <a:p>
+            <a:r>
+              <a:rPr lang="ja-JP" altLang="ja-JP"/>
+              <a:t>でも，歌っているうちに，全体が少し高くなったり低くなったりすることがあります。</a:t>
+            </a:r>
+          </a:p>
+          <a:p>
+            <a:r>
+              <a:rPr lang="ja-JP" altLang="ja-JP"/>
+              <a:t>このとき，すぐに「別の調になった」と考えるのではなくて，</a:t>
+            </a:r>
+            <a:br>
+              <a:rPr lang="ja-JP" altLang="ja-JP"/>
+            </a:br>
+            <a:r>
+              <a:rPr lang="ja-JP" altLang="ja-JP"/>
+              <a:t>「同じ調性的な関係を保ったまま，基準そのものが少し動いた」と考えることができます。</a:t>
+            </a:r>
+          </a:p>
+          <a:p>
+            <a:r>
+              <a:rPr lang="ja-JP" altLang="ja-JP"/>
+              <a:t>これを</a:t>
+            </a:r>
+            <a:r>
+              <a:rPr lang="ja-JP" altLang="ja-JP" b="1"/>
+              <a:t>Adjustment，調整</a:t>
+            </a:r>
+            <a:r>
+              <a:rPr lang="ja-JP" altLang="ja-JP"/>
+              <a:t>として扱います。</a:t>
+            </a:r>
+          </a:p>
+          <a:p>
+            <a:r>
+              <a:rPr lang="ja-JP" altLang="ja-JP"/>
+              <a:t>一方で，それまでのFrameでは，もう歌唱をうまく説明できなくなる場合もあります。</a:t>
+            </a:r>
+          </a:p>
+          <a:p>
+            <a:r>
+              <a:rPr lang="ja-JP" altLang="ja-JP"/>
+              <a:t>その場合には，単にFrameをずらし続けるのではなく，新しい調性参照を</a:t>
+            </a:r>
+            <a:r>
+              <a:rPr lang="ja-JP" altLang="ja-JP" b="1"/>
+              <a:t>再形成する</a:t>
+            </a:r>
+            <a:r>
+              <a:rPr lang="ja-JP" altLang="ja-JP"/>
+              <a:t>。</a:t>
+            </a:r>
+          </a:p>
+          <a:p>
+            <a:r>
+              <a:rPr lang="ja-JP" altLang="ja-JP"/>
+              <a:t>つまり，</a:t>
+            </a:r>
+          </a:p>
+          <a:p>
+            <a:r>
+              <a:rPr lang="ja-JP" altLang="en-US" b="1"/>
+              <a:t>形成、維持、調性、再形成。</a:t>
+            </a:r>
+            <a:endParaRPr lang="en-US" altLang="ja-JP" b="1" dirty="0"/>
+          </a:p>
+          <a:p>
+            <a:r>
+              <a:rPr lang="ja-JP" altLang="ja-JP"/>
+              <a:t>この研究で見たいのは，「いま何調なのか」という一点の答えだけではなくて，</a:t>
+            </a:r>
+            <a:r>
+              <a:rPr lang="ja-JP" altLang="ja-JP" b="1"/>
+              <a:t>歌い手の調性参照が，時間の中でどのように形成され，維持され，調整され，そして必要なら再形成されるのか</a:t>
+            </a:r>
+            <a:r>
+              <a:rPr lang="ja-JP" altLang="ja-JP"/>
+              <a:t>という状態の変化です。</a:t>
+            </a:r>
+          </a:p>
+          <a:p>
+            <a:r>
+              <a:rPr lang="ja-JP" altLang="ja-JP"/>
+              <a:t>これを計算機上で扱えるようにするのが，Dynamic Tonal Perspectiveです。</a:t>
+            </a:r>
+            <a:endParaRPr lang="en-US" altLang="ja-JP" dirty="0"/>
+          </a:p>
+          <a:p>
+            <a:endParaRPr lang="en-US" altLang="ja-JP" dirty="0"/>
+          </a:p>
+          <a:p>
+            <a:pPr marL="0" marR="0" lvl="0" indent="0" algn="l" defTabSz="914400" rtl="0" eaLnBrk="1" fontAlgn="auto" latinLnBrk="0" hangingPunct="1">
+              <a:lnSpc>
+                <a:spcPct val="100000"/>
+              </a:lnSpc>
+              <a:spcBef>
+                <a:spcPts val="0"/>
+              </a:spcBef>
+              <a:spcAft>
+                <a:spcPts val="0"/>
+              </a:spcAft>
+              <a:buClrTx/>
+              <a:buSzTx/>
+              <a:buFontTx/>
+              <a:buNone/>
+              <a:tabLst/>
+              <a:defRPr/>
+            </a:pPr>
+            <a:r>
+              <a:rPr lang="ja-JP" altLang="ja-JP"/>
+              <a:t>では，このような状態の変化を，システムの中ではどう扱っているの</a:t>
+            </a:r>
+            <a:r>
+              <a:rPr lang="ja-JP" altLang="en-US"/>
+              <a:t>かというと。</a:t>
+            </a:r>
+            <a:endParaRPr lang="ja-JP" altLang="ja-JP"/>
           </a:p>
         </p:txBody>
       </p:sp>
@@ -1573,37 +1718,58 @@
           <a:p>
             <a:r>
               <a:rPr lang="ja-JP" altLang="ja-JP"/>
-              <a:t>[7枚目　上演で何が起きていたか]</a:t>
-            </a:r>
-          </a:p>
-          <a:p>
-            <a:r>
-              <a:rPr lang="ja-JP" altLang="ja-JP"/>
-              <a:t>先ほどの上演では，内部ではおおよそこの処理が行われていました．</a:t>
-            </a:r>
-          </a:p>
-          <a:p>
-            <a:r>
-              <a:rPr lang="ja-JP" altLang="ja-JP"/>
-              <a:t>まず歌声の音高を観測し，そこから歌い手が現在どのような調性基準で歌っているかを追跡します．</a:t>
-            </a:r>
-          </a:p>
-          <a:p>
-            <a:r>
-              <a:rPr lang="ja-JP" altLang="ja-JP"/>
-              <a:t>その基準に対して，和声や対位法の関係を解釈し，複数の声部の目標音高を決めます．</a:t>
-            </a:r>
-          </a:p>
-          <a:p>
-            <a:r>
-              <a:rPr lang="ja-JP" altLang="ja-JP"/>
-              <a:t>そのため，最初にどの絶対音高から歌い始めたかよりも，「その人がいま何を基準にして歌っているか」の方を重視しています．</a:t>
-            </a:r>
-          </a:p>
-          <a:p>
-            <a:r>
-              <a:rPr lang="ja-JP" altLang="ja-JP"/>
-              <a:t>結果として，歌い手が少しずれていっても，合唱全体がその変化についてくる，という体験になります．</a:t>
+              <a:t>先ほどの実演では，私が歌うと，その声に合わせて複数の声部がリアルタイムに生成されていました．</a:t>
+            </a:r>
+          </a:p>
+          <a:p>
+            <a:r>
+              <a:rPr lang="ja-JP" altLang="ja-JP"/>
+              <a:t>内部では，まず歌声から音高を観測します．</a:t>
+            </a:r>
+          </a:p>
+          <a:p>
+            <a:r>
+              <a:rPr lang="ja-JP" altLang="ja-JP"/>
+              <a:t>ただし，観測された音高をそのまま音楽的な音として扱うわけではありません．</a:t>
+            </a:r>
+            <a:br>
+              <a:rPr lang="ja-JP" altLang="ja-JP"/>
+            </a:br>
+            <a:r>
+              <a:rPr lang="ja-JP" altLang="ja-JP"/>
+              <a:t>Pitch Interpreterで時間的な文脈も見ながら，歌い手がどの音を歌っていると解釈するかを決めます．</a:t>
+            </a:r>
+          </a:p>
+          <a:p>
+            <a:r>
+              <a:rPr lang="ja-JP" altLang="ja-JP"/>
+              <a:t>そこから，現在のRelative Tonal Frameを基準として，その音を相対的なScale Degreeとして解釈します．</a:t>
+            </a:r>
+          </a:p>
+          <a:p>
+            <a:r>
+              <a:rPr lang="ja-JP" altLang="ja-JP"/>
+              <a:t>そしてHarmony Generatorでは，そのRelative Tonal Frameを基準に，和声や対位法，Voice Leadingを考慮して，各生成声部が次に歌うTarget Pitchを決めます．</a:t>
+            </a:r>
+          </a:p>
+          <a:p>
+            <a:r>
+              <a:rPr lang="ja-JP" altLang="ja-JP"/>
+              <a:t>最後に，そのTarget Pitchへ入力された私の歌声を変換して，複数の声部として出力します．</a:t>
+            </a:r>
+          </a:p>
+          <a:p>
+            <a:r>
+              <a:rPr lang="ja-JP" altLang="ja-JP"/>
+              <a:t>つまり，</a:t>
+            </a:r>
+            <a:r>
+              <a:rPr lang="ja-JP" altLang="ja-JP" b="1"/>
+              <a:t>私があらかじめ決められたハーモニーに合わせて歌うのではなく，その時点の私の調性参照を基準として，ハーモニーの側が生成される</a:t>
+            </a:r>
+            <a:r>
+              <a:rPr lang="ja-JP" altLang="ja-JP"/>
+              <a:t>という仕組みです．</a:t>
             </a:r>
           </a:p>
         </p:txBody>
@@ -1926,7 +2092,7 @@
           <a:p>
             <a:fld id="{656550A6-3580-8943-B68E-76CA7D86FA70}" type="datetimeFigureOut">
               <a:rPr kumimoji="1" lang="ja-JP" altLang="en-US" smtClean="0"/>
-              <a:t>2026/8/30</a:t>
+              <a:t>2026/8/31</a:t>
             </a:fld>
             <a:endParaRPr kumimoji="1" lang="ja-JP" altLang="en-US"/>
           </a:p>
@@ -2156,7 +2322,7 @@
           <a:p>
             <a:fld id="{656550A6-3580-8943-B68E-76CA7D86FA70}" type="datetimeFigureOut">
               <a:rPr kumimoji="1" lang="ja-JP" altLang="en-US" smtClean="0"/>
-              <a:t>2026/8/30</a:t>
+              <a:t>2026/8/31</a:t>
             </a:fld>
             <a:endParaRPr kumimoji="1" lang="ja-JP" altLang="en-US"/>
           </a:p>
@@ -2396,7 +2562,7 @@
           <a:p>
             <a:fld id="{656550A6-3580-8943-B68E-76CA7D86FA70}" type="datetimeFigureOut">
               <a:rPr kumimoji="1" lang="ja-JP" altLang="en-US" smtClean="0"/>
-              <a:t>2026/8/30</a:t>
+              <a:t>2026/8/31</a:t>
             </a:fld>
             <a:endParaRPr kumimoji="1" lang="ja-JP" altLang="en-US"/>
           </a:p>
@@ -2685,7 +2851,7 @@
           <a:p>
             <a:fld id="{656550A6-3580-8943-B68E-76CA7D86FA70}" type="datetimeFigureOut">
               <a:rPr kumimoji="1" lang="ja-JP" altLang="en-US" smtClean="0"/>
-              <a:t>2026/8/30</a:t>
+              <a:t>2026/8/31</a:t>
             </a:fld>
             <a:endParaRPr kumimoji="1" lang="ja-JP" altLang="en-US"/>
           </a:p>
@@ -2960,7 +3126,7 @@
           <a:p>
             <a:fld id="{656550A6-3580-8943-B68E-76CA7D86FA70}" type="datetimeFigureOut">
               <a:rPr kumimoji="1" lang="ja-JP" altLang="en-US" smtClean="0"/>
-              <a:t>2026/8/30</a:t>
+              <a:t>2026/8/31</a:t>
             </a:fld>
             <a:endParaRPr kumimoji="1" lang="ja-JP" altLang="en-US"/>
           </a:p>
@@ -3289,7 +3455,7 @@
           <a:p>
             <a:fld id="{656550A6-3580-8943-B68E-76CA7D86FA70}" type="datetimeFigureOut">
               <a:rPr kumimoji="1" lang="ja-JP" altLang="en-US" smtClean="0"/>
-              <a:t>2026/8/30</a:t>
+              <a:t>2026/8/31</a:t>
             </a:fld>
             <a:endParaRPr kumimoji="1" lang="ja-JP" altLang="en-US"/>
           </a:p>
@@ -3765,7 +3931,7 @@
           <a:p>
             <a:fld id="{656550A6-3580-8943-B68E-76CA7D86FA70}" type="datetimeFigureOut">
               <a:rPr kumimoji="1" lang="ja-JP" altLang="en-US" smtClean="0"/>
-              <a:t>2026/8/30</a:t>
+              <a:t>2026/8/31</a:t>
             </a:fld>
             <a:endParaRPr kumimoji="1" lang="ja-JP" altLang="en-US"/>
           </a:p>
@@ -3906,7 +4072,7 @@
           <a:p>
             <a:fld id="{656550A6-3580-8943-B68E-76CA7D86FA70}" type="datetimeFigureOut">
               <a:rPr kumimoji="1" lang="ja-JP" altLang="en-US" smtClean="0"/>
-              <a:t>2026/8/30</a:t>
+              <a:t>2026/8/31</a:t>
             </a:fld>
             <a:endParaRPr kumimoji="1" lang="ja-JP" altLang="en-US"/>
           </a:p>
@@ -4019,7 +4185,7 @@
           <a:p>
             <a:fld id="{656550A6-3580-8943-B68E-76CA7D86FA70}" type="datetimeFigureOut">
               <a:rPr kumimoji="1" lang="ja-JP" altLang="en-US" smtClean="0"/>
-              <a:t>2026/8/30</a:t>
+              <a:t>2026/8/31</a:t>
             </a:fld>
             <a:endParaRPr kumimoji="1" lang="ja-JP" altLang="en-US"/>
           </a:p>
@@ -4362,7 +4528,7 @@
           <a:p>
             <a:fld id="{656550A6-3580-8943-B68E-76CA7D86FA70}" type="datetimeFigureOut">
               <a:rPr kumimoji="1" lang="ja-JP" altLang="en-US" smtClean="0"/>
-              <a:t>2026/8/30</a:t>
+              <a:t>2026/8/31</a:t>
             </a:fld>
             <a:endParaRPr kumimoji="1" lang="ja-JP" altLang="en-US"/>
           </a:p>
@@ -4650,7 +4816,7 @@
           <a:p>
             <a:fld id="{656550A6-3580-8943-B68E-76CA7D86FA70}" type="datetimeFigureOut">
               <a:rPr kumimoji="1" lang="ja-JP" altLang="en-US" smtClean="0"/>
-              <a:t>2026/8/30</a:t>
+              <a:t>2026/8/31</a:t>
             </a:fld>
             <a:endParaRPr kumimoji="1" lang="ja-JP" altLang="en-US"/>
           </a:p>
@@ -4923,7 +5089,7 @@
           <a:p>
             <a:fld id="{656550A6-3580-8943-B68E-76CA7D86FA70}" type="datetimeFigureOut">
               <a:rPr kumimoji="1" lang="ja-JP" altLang="en-US" smtClean="0"/>
-              <a:t>2026/8/30</a:t>
+              <a:t>2026/8/31</a:t>
             </a:fld>
             <a:endParaRPr kumimoji="1" lang="ja-JP" altLang="en-US"/>
           </a:p>
@@ -6395,82 +6561,64 @@
         </p:nvSpPr>
         <p:spPr/>
         <p:txBody>
-          <a:bodyPr/>
-          <a:lstStyle/>
-          <a:p>
-            <a:r>
-              <a:rPr lang="ja-JP" altLang="ja-JP"/>
-              <a:t>Dynamic Tonal Perspective</a:t>
-            </a:r>
-            <a:endParaRPr kumimoji="1" lang="ja-JP" altLang="en-US"/>
-          </a:p>
-        </p:txBody>
-      </p:sp>
-      <p:sp>
-        <p:nvSpPr>
-          <p:cNvPr id="3" name="コンテンツ プレースホルダー 2">
-            <a:extLst>
-              <a:ext uri="{FF2B5EF4-FFF2-40B4-BE49-F238E27FC236}">
-                <a16:creationId xmlns:a16="http://schemas.microsoft.com/office/drawing/2014/main" id="{97D662C9-DBB7-DAF2-1028-2D0925D7FCA9}"/>
-              </a:ext>
-            </a:extLst>
-          </p:cNvPr>
-          <p:cNvSpPr>
-            <a:spLocks noGrp="1"/>
-          </p:cNvSpPr>
+          <a:bodyPr>
+            <a:normAutofit/>
+          </a:bodyPr>
+          <a:lstStyle/>
+          <a:p>
+            <a:r>
+              <a:rPr lang="ja-JP" altLang="ja-JP" b="1">
+                <a:latin typeface="+mn-lt"/>
+                <a:ea typeface="MS PGothic" panose="020B0600070205080204" pitchFamily="34" charset="-128"/>
+              </a:rPr>
+              <a:t>Relative Tonal Frameはどう動くのか？</a:t>
+            </a:r>
+            <a:br>
+              <a:rPr lang="ja-JP" altLang="ja-JP" b="1">
+                <a:latin typeface="+mn-lt"/>
+                <a:ea typeface="MS PGothic" panose="020B0600070205080204" pitchFamily="34" charset="-128"/>
+              </a:rPr>
+            </a:br>
+            <a:r>
+              <a:rPr lang="ja-JP" altLang="ja-JP" sz="3600" i="1"/>
+              <a:t>How does the Relative Tonal Frame evolve over time?</a:t>
+            </a:r>
+            <a:endParaRPr lang="ja-JP" altLang="ja-JP" sz="3600"/>
+          </a:p>
+        </p:txBody>
+      </p:sp>
+      <p:pic>
+        <p:nvPicPr>
+          <p:cNvPr id="6" name="コンテンツ プレースホルダー 5">
+            <a:extLst>
+              <a:ext uri="{FF2B5EF4-FFF2-40B4-BE49-F238E27FC236}">
+                <a16:creationId xmlns:a16="http://schemas.microsoft.com/office/drawing/2014/main" id="{6CB1BA6B-A057-49DE-348D-417DDB82EA5F}"/>
+              </a:ext>
+            </a:extLst>
+          </p:cNvPr>
+          <p:cNvPicPr>
+            <a:picLocks noGrp="1" noChangeAspect="1"/>
+          </p:cNvPicPr>
           <p:nvPr>
             <p:ph idx="1"/>
           </p:nvPr>
-        </p:nvSpPr>
-        <p:spPr/>
-        <p:txBody>
-          <a:bodyPr/>
-          <a:lstStyle/>
-          <a:p>
-            <a:r>
-              <a:rPr kumimoji="1" lang="ja-JP" altLang="en-US"/>
-              <a:t>形成</a:t>
-            </a:r>
-          </a:p>
-          <a:p>
-            <a:r>
-              <a:rPr kumimoji="1" lang="ja-JP" altLang="en-US"/>
-              <a:t> ↓</a:t>
-            </a:r>
-          </a:p>
-          <a:p>
-            <a:r>
-              <a:rPr kumimoji="1" lang="ja-JP" altLang="en-US"/>
-              <a:t>維持</a:t>
-            </a:r>
-          </a:p>
-          <a:p>
-            <a:r>
-              <a:rPr kumimoji="1" lang="ja-JP" altLang="en-US"/>
-              <a:t> ↓</a:t>
-            </a:r>
-          </a:p>
-          <a:p>
-            <a:r>
-              <a:rPr kumimoji="1" lang="ja-JP" altLang="en-US"/>
-              <a:t>調整</a:t>
-            </a:r>
-          </a:p>
-          <a:p>
-            <a:r>
-              <a:rPr kumimoji="1" lang="ja-JP" altLang="en-US"/>
-              <a:t> ↓</a:t>
-            </a:r>
-          </a:p>
-          <a:p>
-            <a:r>
-              <a:rPr kumimoji="1" lang="ja-JP" altLang="en-US"/>
-              <a:t>再形成</a:t>
-            </a:r>
-            <a:endParaRPr kumimoji="1" lang="en-US" altLang="ja-JP" dirty="0"/>
-          </a:p>
-        </p:txBody>
-      </p:sp>
+        </p:nvPicPr>
+        <p:blipFill>
+          <a:blip r:embed="rId3"/>
+          <a:stretch>
+            <a:fillRect/>
+          </a:stretch>
+        </p:blipFill>
+        <p:spPr>
+          <a:xfrm>
+            <a:off x="17936" y="27196"/>
+            <a:ext cx="12199622" cy="6858640"/>
+          </a:xfrm>
+          <a:prstGeom prst="rect">
+            <a:avLst/>
+          </a:prstGeom>
+        </p:spPr>
+      </p:pic>
     </p:spTree>
     <p:extLst>
       <p:ext uri="{BB962C8B-B14F-4D97-AF65-F5344CB8AC3E}">
@@ -6519,13 +6667,31 @@
         </p:nvSpPr>
         <p:spPr/>
         <p:txBody>
-          <a:bodyPr/>
-          <a:lstStyle/>
-          <a:p>
-            <a:r>
-              <a:rPr kumimoji="1" lang="ja-JP" altLang="en-US"/>
-              <a:t>システム構成</a:t>
-            </a:r>
+          <a:bodyPr>
+            <a:normAutofit/>
+          </a:bodyPr>
+          <a:lstStyle/>
+          <a:p>
+            <a:r>
+              <a:rPr lang="ja-JP" altLang="ja-JP" b="1">
+                <a:latin typeface="+mn-lt"/>
+              </a:rPr>
+              <a:t>調性参照の変化を，どう計算するか</a:t>
+            </a:r>
+            <a:br>
+              <a:rPr lang="ja-JP" altLang="ja-JP" b="1">
+                <a:latin typeface="+mn-lt"/>
+              </a:rPr>
+            </a:br>
+            <a:r>
+              <a:rPr lang="ja-JP" altLang="ja-JP" sz="3200" i="1">
+                <a:latin typeface="+mn-lt"/>
+              </a:rPr>
+              <a:t>How do we model and update the tonal reference?</a:t>
+            </a:r>
+            <a:endParaRPr lang="ja-JP" altLang="ja-JP" sz="3200">
+              <a:latin typeface="+mn-lt"/>
+            </a:endParaRPr>
           </a:p>
         </p:txBody>
       </p:sp>
@@ -6643,6 +6809,36 @@
           </a:p>
         </p:txBody>
       </p:sp>
+      <p:pic>
+        <p:nvPicPr>
+          <p:cNvPr id="4" name="図 3">
+            <a:extLst>
+              <a:ext uri="{FF2B5EF4-FFF2-40B4-BE49-F238E27FC236}">
+                <a16:creationId xmlns:a16="http://schemas.microsoft.com/office/drawing/2014/main" id="{B5E93DAB-F79F-0D64-805F-F0B72CD51E70}"/>
+              </a:ext>
+            </a:extLst>
+          </p:cNvPr>
+          <p:cNvPicPr>
+            <a:picLocks noChangeAspect="1"/>
+          </p:cNvPicPr>
+          <p:nvPr/>
+        </p:nvPicPr>
+        <p:blipFill>
+          <a:blip r:embed="rId3"/>
+          <a:stretch>
+            <a:fillRect/>
+          </a:stretch>
+        </p:blipFill>
+        <p:spPr>
+          <a:xfrm>
+            <a:off x="-3245" y="0"/>
+            <a:ext cx="12195243" cy="6856176"/>
+          </a:xfrm>
+          <a:prstGeom prst="rect">
+            <a:avLst/>
+          </a:prstGeom>
+        </p:spPr>
+      </p:pic>
     </p:spTree>
     <p:extLst>
       <p:ext uri="{BB962C8B-B14F-4D97-AF65-F5344CB8AC3E}">
